--- a/lectures/Lecture 1.2 - Unix and the Command Line.pptx
+++ b/lectures/Lecture 1.2 - Unix and the Command Line.pptx
@@ -998,7 +998,7 @@
             </a:pPr>
             <a:r>
               <a:rPr lang="en-US" dirty="0"/>
-              <a:t>rm -rf / would recursively delete everything on the system from root. Modern systems have a safeguard (--no-preserve-root required). The CLI gives you power with no safety net.</a:t>
+              <a:t>rm -rf / would walk the whole system from root and delete it. Modern systems make you pass --no-preserve-root before they'll let you, which is a safeguard that got bolted on after enough people found out the hard way...but broadly the CLI hands you the power and trusts you with it.</a:t>
             </a:r>
             <a:endParaRPr dirty="0"/>
           </a:p>
@@ -1156,7 +1156,7 @@
             </a:pPr>
             <a:r>
               <a:rPr lang="en-US"/>
-              <a:t>cat is fine for small files. less is better for anything long. tail -f is great for watching server logs - they'll use this when debugging their web server later.</a:t>
+              <a:t>cat is fine for something small, less is what you want the second the file is long, and tail -f is for watching a log as it's being written, which they'll be doing to their own web server in a few weeks.</a:t>
             </a:r>
             <a:endParaRPr/>
           </a:p>
@@ -1472,7 +1472,7 @@
             </a:pPr>
             <a:r>
               <a:rPr lang="en-US"/>
-              <a:t>Mental model: every program has an input pipe and two output pipes (normal output + errors). Redirection lets you rewire them.</a:t>
+              <a:t>Every program has one pipe in and two pipes out, normal output and errors, and redirection is just rewiring which end of each one goes where.</a:t>
             </a:r>
             <a:endParaRPr/>
           </a:p>
@@ -1946,7 +1946,7 @@
             </a:pPr>
             <a:r>
               <a:rPr lang="en-US"/>
-              <a:t>Pipes are the Unix superpower. This is where 'do one thing well' pays off. Each tool is simple; the pipe makes them powerful together.</a:t>
+              <a:t>Pipes are the Unix superpower, and this is the slide where 'do one thing well' stops being a slogan - every one of these tools is dumb on its own, and all the power comes from chaining them together.</a:t>
             </a:r>
             <a:endParaRPr/>
           </a:p>
@@ -2104,7 +2104,7 @@
             </a:pPr>
             <a:r>
               <a:rPr lang="en-US"/>
-              <a:t>Pipes are the Unix superpower. This is where 'do one thing well' pays off. Each tool is simple; the pipe makes them powerful together.</a:t>
+              <a:t>Pipes are the Unix superpower, and this is the slide where 'do one thing well' stops being a slogan - every one of these tools is dumb on its own, and all the power comes from chaining them together.</a:t>
             </a:r>
             <a:endParaRPr/>
           </a:p>
@@ -2757,7 +2757,7 @@
             </a:pPr>
             <a:r>
               <a:rPr lang="en-US"/>
-              <a:t>Just a taste. The point: any sequence of commands you repeat can be scripted. Connects to CI/CD later (GitHub Actions = shell scripts in YAML).</a:t>
+              <a:t>Just a taste here. Anything you find yourself typing twice can be scripted, and that idea comes back in week 8 when GitHub Actions turns out to be shell scripts wearing YAML.</a:t>
             </a:r>
             <a:endParaRPr/>
           </a:p>
@@ -3385,7 +3385,7 @@
             </a:pPr>
             <a:r>
               <a:rPr lang="en-US"/>
-              <a:t>Setup for later: Flask reads SECRET_KEY, DATABASE_URL, etc. from env vars. Show $PATH and explain it's how the shell finds commands.</a:t>
+              <a:t>Setup for later, because FastAPI is gonna read SECRET_KEY and DATABASE_URL and the rest out of env vars. Show $PATH while you're in here and explain that it's how the shell finds commands at all.</a:t>
             </a:r>
             <a:endParaRPr/>
           </a:p>
@@ -4254,7 +4254,7 @@
             </a:pPr>
             <a:r>
               <a:rPr lang="en-US"/>
-              <a:t>Every command follows this pattern: verb, optional flags, arguments. Flags modify behavior. Arguments say what to act on.</a:t>
+              <a:t>Every command is the same shape - verb first, then optional flags that change how it behaves, then the arguments saying what to do it to.</a:t>
             </a:r>
             <a:endParaRPr/>
           </a:p>
@@ -4412,7 +4412,7 @@
             </a:pPr>
             <a:r>
               <a:rPr lang="en-US"/>
-              <a:t>These three commands are 80% of navigation. Mental model: you're always 'standing' in a directory.</a:t>
+              <a:t>These three are most of what you'll ever do to get around. The thing to hold onto is that you're always 'standing' somewhere in the tree.</a:t>
             </a:r>
             <a:endParaRPr/>
           </a:p>

--- a/lectures/Lecture 1.2 - Unix and the Command Line.pptx
+++ b/lectures/Lecture 1.2 - Unix and the Command Line.pptx
@@ -828,22 +828,7 @@
             <a:noAutofit/>
           </a:bodyPr>
           <a:lstStyle/>
-          <a:p>
-            <a:pPr marL="0" lvl="0" indent="0" algn="l" rtl="0">
-              <a:spcBef>
-                <a:spcPts val="0"/>
-              </a:spcBef>
-              <a:spcAft>
-                <a:spcPts val="0"/>
-              </a:spcAft>
-              <a:buNone/>
-            </a:pPr>
-            <a:r>
-              <a:rPr lang="en-US"/>
-              <a:t>Today we get hands dirty with the terminal. Everything we build this semester runs through the command line.</a:t>
-            </a:r>
-            <a:endParaRPr/>
-          </a:p>
+          <a:p/>
         </p:txBody>
       </p:sp>
       <p:sp>
@@ -987,20 +972,9 @@
           </a:bodyPr>
           <a:lstStyle/>
           <a:p>
-            <a:pPr marL="0" lvl="0" indent="0" algn="l" rtl="0">
-              <a:spcBef>
-                <a:spcPts val="0"/>
-              </a:spcBef>
-              <a:spcAft>
-                <a:spcPts val="0"/>
-              </a:spcAft>
-              <a:buNone/>
-            </a:pPr>
-            <a:r>
-              <a:rPr lang="en-US" dirty="0"/>
-              <a:t>rm -rf / would walk the whole system from root and delete it. Modern systems make you pass --no-preserve-root before they'll let you, which is a safeguard that got bolted on after enough people found out the hard way...but broadly the CLI hands you the power and trusts you with it.</a:t>
-            </a:r>
-            <a:endParaRPr dirty="0"/>
+            <a:r>
+              <a:t>Answer: walks from root and deletes everything; modern systems require `--no-preserve-root`.</a:t>
+            </a:r>
           </a:p>
         </p:txBody>
       </p:sp>
@@ -1145,20 +1119,9 @@
           </a:bodyPr>
           <a:lstStyle/>
           <a:p>
-            <a:pPr marL="0" lvl="0" indent="0" algn="l" rtl="0">
-              <a:spcBef>
-                <a:spcPts val="0"/>
-              </a:spcBef>
-              <a:spcAft>
-                <a:spcPts val="0"/>
-              </a:spcAft>
-              <a:buNone/>
-            </a:pPr>
-            <a:r>
-              <a:rPr lang="en-US"/>
-              <a:t>cat is fine for something small, less is what you want the second the file is long, and tail -f is for watching a log as it's being written, which they'll be doing to their own web server in a few weeks.</a:t>
-            </a:r>
-            <a:endParaRPr/>
+            <a:r>
+              <a:t>`tail -f`: they'll use this on their own web server in a few weeks.</a:t>
+            </a:r>
           </a:p>
         </p:txBody>
       </p:sp>
@@ -1302,22 +1265,7 @@
             <a:noAutofit/>
           </a:bodyPr>
           <a:lstStyle/>
-          <a:p>
-            <a:pPr marL="0" lvl="0" indent="0" algn="l" rtl="0">
-              <a:spcBef>
-                <a:spcPts val="0"/>
-              </a:spcBef>
-              <a:spcAft>
-                <a:spcPts val="0"/>
-              </a:spcAft>
-              <a:buNone/>
-            </a:pPr>
-            <a:r>
-              <a:rPr lang="en-US"/>
-              <a:t>mv does double duty: it renames if dest is in the same directory, moves if dest is a different directory.</a:t>
-            </a:r>
-            <a:endParaRPr/>
-          </a:p>
+          <a:p/>
         </p:txBody>
       </p:sp>
       <p:sp>
@@ -1460,22 +1408,7 @@
             <a:noAutofit/>
           </a:bodyPr>
           <a:lstStyle/>
-          <a:p>
-            <a:pPr marL="0" lvl="0" indent="0" algn="l" rtl="0">
-              <a:spcBef>
-                <a:spcPts val="0"/>
-              </a:spcBef>
-              <a:spcAft>
-                <a:spcPts val="0"/>
-              </a:spcAft>
-              <a:buNone/>
-            </a:pPr>
-            <a:r>
-              <a:rPr lang="en-US"/>
-              <a:t>Every program has one pipe in and two pipes out, normal output and errors, and redirection is just rewiring which end of each one goes where.</a:t>
-            </a:r>
-            <a:endParaRPr/>
-          </a:p>
+          <a:p/>
         </p:txBody>
       </p:sp>
       <p:sp>
@@ -1619,20 +1552,9 @@
           </a:bodyPr>
           <a:lstStyle/>
           <a:p>
-            <a:pPr marL="0" lvl="0" indent="0" algn="l" rtl="0">
-              <a:spcBef>
-                <a:spcPts val="0"/>
-              </a:spcBef>
-              <a:spcAft>
-                <a:spcPts val="0"/>
-              </a:spcAft>
-              <a:buNone/>
-            </a:pPr>
-            <a:r>
-              <a:rPr lang="en-US"/>
-              <a:t>We're building the skeleton of the chat app they'll work on all semester.</a:t>
-            </a:r>
-            <a:endParaRPr/>
+            <a:r>
+              <a:t>Skeleton of the semester-long chat app.</a:t>
+            </a:r>
           </a:p>
         </p:txBody>
       </p:sp>
@@ -1776,22 +1698,7 @@
             <a:noAutofit/>
           </a:bodyPr>
           <a:lstStyle/>
-          <a:p>
-            <a:pPr marL="0" lvl="0" indent="0" algn="l" rtl="0">
-              <a:spcBef>
-                <a:spcPts val="0"/>
-              </a:spcBef>
-              <a:spcAft>
-                <a:spcPts val="0"/>
-              </a:spcAft>
-              <a:buNone/>
-            </a:pPr>
-            <a:r>
-              <a:rPr lang="en-US"/>
-              <a:t>This is the skeleton of the chat app. 'mkdir -p' creates nested dirs. 'ls -R' lists recursively.</a:t>
-            </a:r>
-            <a:endParaRPr/>
-          </a:p>
+          <a:p/>
         </p:txBody>
       </p:sp>
       <p:sp>
@@ -1934,22 +1841,7 @@
             <a:noAutofit/>
           </a:bodyPr>
           <a:lstStyle/>
-          <a:p>
-            <a:pPr marL="0" lvl="0" indent="0" algn="l" rtl="0">
-              <a:spcBef>
-                <a:spcPts val="0"/>
-              </a:spcBef>
-              <a:spcAft>
-                <a:spcPts val="0"/>
-              </a:spcAft>
-              <a:buNone/>
-            </a:pPr>
-            <a:r>
-              <a:rPr lang="en-US"/>
-              <a:t>Pipes are the Unix superpower, and this is the slide where 'do one thing well' stops being a slogan - every one of these tools is dumb on its own, and all the power comes from chaining them together.</a:t>
-            </a:r>
-            <a:endParaRPr/>
-          </a:p>
+          <a:p/>
         </p:txBody>
       </p:sp>
       <p:sp>
@@ -2092,22 +1984,7 @@
             <a:noAutofit/>
           </a:bodyPr>
           <a:lstStyle/>
-          <a:p>
-            <a:pPr marL="0" lvl="0" indent="0" algn="l" rtl="0">
-              <a:spcBef>
-                <a:spcPts val="0"/>
-              </a:spcBef>
-              <a:spcAft>
-                <a:spcPts val="0"/>
-              </a:spcAft>
-              <a:buNone/>
-            </a:pPr>
-            <a:r>
-              <a:rPr lang="en-US"/>
-              <a:t>Pipes are the Unix superpower, and this is the slide where 'do one thing well' stops being a slogan - every one of these tools is dumb on its own, and all the power comes from chaining them together.</a:t>
-            </a:r>
-            <a:endParaRPr/>
-          </a:p>
+          <a:p/>
         </p:txBody>
       </p:sp>
       <p:sp>
@@ -2250,22 +2127,7 @@
             <a:noAutofit/>
           </a:bodyPr>
           <a:lstStyle/>
-          <a:p>
-            <a:pPr marL="0" lvl="0" indent="0" algn="l" rtl="0">
-              <a:spcBef>
-                <a:spcPts val="0"/>
-              </a:spcBef>
-              <a:spcAft>
-                <a:spcPts val="0"/>
-              </a:spcAft>
-              <a:buNone/>
-            </a:pPr>
-            <a:r>
-              <a:rPr lang="en-US"/>
-              <a:t>grep is one of the most-used commands in all of Unix. -r recursive, -i case-insensitive, -n line numbers, -v invert.</a:t>
-            </a:r>
-            <a:endParaRPr/>
-          </a:p>
+          <a:p/>
         </p:txBody>
       </p:sp>
       <p:sp>
@@ -2408,22 +2270,7 @@
             <a:noAutofit/>
           </a:bodyPr>
           <a:lstStyle/>
-          <a:p>
-            <a:pPr marL="0" lvl="0" indent="0" algn="l" rtl="0">
-              <a:spcBef>
-                <a:spcPts val="0"/>
-              </a:spcBef>
-              <a:spcAft>
-                <a:spcPts val="0"/>
-              </a:spcAft>
-              <a:buNone/>
-            </a:pPr>
-            <a:r>
-              <a:rPr lang="en-US"/>
-              <a:t>grep is one of the most-used commands in all of Unix. -r recursive, -i case-insensitive, -n line numbers, -v invert.</a:t>
-            </a:r>
-            <a:endParaRPr/>
-          </a:p>
+          <a:p/>
         </p:txBody>
       </p:sp>
       <p:sp>
@@ -2567,41 +2414,9 @@
           </a:bodyPr>
           <a:lstStyle/>
           <a:p>
-            <a:pPr marL="0" lvl="0" indent="0" algn="l" rtl="0">
-              <a:spcBef>
-                <a:spcPts val="0"/>
-              </a:spcBef>
-              <a:spcAft>
-                <a:spcPts val="0"/>
-              </a:spcAft>
-              <a:buNone/>
-            </a:pPr>
-            <a:r>
-              <a:rPr lang="en-US"/>
-              <a:t>Three reasons we’re gonna talk about this:</a:t>
-            </a:r>
-            <a:br>
-              <a:rPr lang="en-US"/>
-            </a:br>
-            <a:r>
-              <a:rPr lang="en-US"/>
-              <a:t>1) It’s the bedrock of everything</a:t>
-            </a:r>
-            <a:br>
-              <a:rPr lang="en-US"/>
-            </a:br>
-            <a:r>
-              <a:rPr lang="en-US"/>
-              <a:t>2) it’s in this context that you’ll be using git</a:t>
-            </a:r>
-            <a:br>
-              <a:rPr lang="en-US"/>
-            </a:br>
-            <a:r>
-              <a:rPr lang="en-US"/>
-              <a:t>3) you’ll see your coding agent running unix commands and you should understand what it’s doing</a:t>
-            </a:r>
-            <a:endParaRPr/>
+            <a:r>
+              <a:t>Two reasons not on slide: git lives here, your coding agent runs these commands.</a:t>
+            </a:r>
           </a:p>
         </p:txBody>
       </p:sp>
@@ -2746,20 +2561,9 @@
           </a:bodyPr>
           <a:lstStyle/>
           <a:p>
-            <a:pPr marL="0" lvl="0" indent="0" algn="l" rtl="0">
-              <a:spcBef>
-                <a:spcPts val="0"/>
-              </a:spcBef>
-              <a:spcAft>
-                <a:spcPts val="0"/>
-              </a:spcAft>
-              <a:buNone/>
-            </a:pPr>
-            <a:r>
-              <a:rPr lang="en-US"/>
-              <a:t>Just a taste here. Anything you find yourself typing twice can be scripted, and that idea comes back in week 8 when GitHub Actions turns out to be shell scripts wearing YAML.</a:t>
-            </a:r>
-            <a:endParaRPr/>
+            <a:r>
+              <a:t>Anything typed twice gets scripted. Week 8: GitHub Actions are shell scripts in YAML.</a:t>
+            </a:r>
           </a:p>
         </p:txBody>
       </p:sp>
@@ -3058,20 +2862,9 @@
           </a:bodyPr>
           <a:lstStyle/>
           <a:p>
-            <a:pPr marL="0" lvl="0" indent="0" algn="l" rtl="0">
-              <a:spcBef>
-                <a:spcPts val="0"/>
-              </a:spcBef>
-              <a:spcAft>
-                <a:spcPts val="0"/>
-              </a:spcAft>
-              <a:buNone/>
-            </a:pPr>
-            <a:r>
-              <a:rPr lang="en-US"/>
-              <a:t>2&gt;/dev/null suppresses permission errors. ls -lS sorts by size (capital S). head -n 6 because first line is 'total'.</a:t>
-            </a:r>
-            <a:endParaRPr/>
+            <a:r>
+              <a:t>`2&gt;/dev/null` hides permission errors; `-S` sorts by size; 6 because line 1 is `total`.</a:t>
+            </a:r>
           </a:p>
         </p:txBody>
       </p:sp>
@@ -3216,20 +3009,9 @@
           </a:bodyPr>
           <a:lstStyle/>
           <a:p>
-            <a:pPr marL="0" lvl="0" indent="0" algn="l" rtl="0">
-              <a:spcBef>
-                <a:spcPts val="0"/>
-              </a:spcBef>
-              <a:spcAft>
-                <a:spcPts val="0"/>
-              </a:spcAft>
-              <a:buNone/>
-            </a:pPr>
-            <a:r>
-              <a:rPr lang="en-US"/>
-              <a:t>Don't go deep on octal. Just enough so they can make a script executable. 'Permission denied' errors often mean you need chmod.</a:t>
-            </a:r>
-            <a:endParaRPr/>
+            <a:r>
+              <a:t>Skip octal. 'Permission denied' usually means chmod.</a:t>
+            </a:r>
           </a:p>
         </p:txBody>
       </p:sp>
@@ -3374,20 +3156,9 @@
           </a:bodyPr>
           <a:lstStyle/>
           <a:p>
-            <a:pPr marL="0" lvl="0" indent="0" algn="l" rtl="0">
-              <a:spcBef>
-                <a:spcPts val="0"/>
-              </a:spcBef>
-              <a:spcAft>
-                <a:spcPts val="0"/>
-              </a:spcAft>
-              <a:buNone/>
-            </a:pPr>
-            <a:r>
-              <a:rPr lang="en-US"/>
-              <a:t>Setup for later, because FastAPI is gonna read SECRET_KEY and DATABASE_URL and the rest out of env vars. Show $PATH while you're in here and explain that it's how the shell finds commands at all.</a:t>
-            </a:r>
-            <a:endParaRPr/>
+            <a:r>
+              <a:t>FastAPI reads SECRET_KEY and DATABASE_URL from env. Show `$PATH`: how the shell finds commands.</a:t>
+            </a:r>
           </a:p>
         </p:txBody>
       </p:sp>
@@ -3532,92 +3303,9 @@
           </a:bodyPr>
           <a:lstStyle/>
           <a:p>
-            <a:pPr marL="0" lvl="0" indent="0" algn="l" rtl="0">
-              <a:spcBef>
-                <a:spcPts val="0"/>
-              </a:spcBef>
-              <a:spcAft>
-                <a:spcPts val="0"/>
-              </a:spcAft>
-              <a:buNone/>
-            </a:pPr>
-            <a:r>
-              <a:rPr lang="en-US" dirty="0"/>
-              <a:t>Several valid approaches:</a:t>
-            </a:r>
-            <a:endParaRPr dirty="0"/>
-          </a:p>
-          <a:p>
-            <a:pPr marL="0" lvl="0" indent="0" algn="l" rtl="0">
-              <a:spcBef>
-                <a:spcPts val="0"/>
-              </a:spcBef>
-              <a:spcAft>
-                <a:spcPts val="0"/>
-              </a:spcAft>
-              <a:buNone/>
-            </a:pPr>
-            <a:r>
-              <a:rPr lang="en-US" dirty="0"/>
-              <a:t>  grep -r 'password' --include='*.</a:t>
-            </a:r>
-            <a:r>
-              <a:rPr lang="en-US" dirty="0" err="1"/>
-              <a:t>py</a:t>
-            </a:r>
-            <a:r>
-              <a:rPr lang="en-US" dirty="0"/>
-              <a:t>' .</a:t>
-            </a:r>
-            <a:endParaRPr dirty="0"/>
-          </a:p>
-          <a:p>
-            <a:pPr marL="0" lvl="0" indent="0" algn="l" rtl="0">
-              <a:spcBef>
-                <a:spcPts val="0"/>
-              </a:spcBef>
-              <a:spcAft>
-                <a:spcPts val="0"/>
-              </a:spcAft>
-              <a:buNone/>
-            </a:pPr>
-            <a:r>
-              <a:rPr lang="en-US" dirty="0"/>
-              <a:t>  find . -name '*.</a:t>
-            </a:r>
-            <a:r>
-              <a:rPr lang="en-US" dirty="0" err="1"/>
-              <a:t>py</a:t>
-            </a:r>
-            <a:r>
-              <a:rPr lang="en-US" dirty="0"/>
-              <a:t>' | </a:t>
-            </a:r>
-            <a:r>
-              <a:rPr lang="en-US" dirty="0" err="1"/>
-              <a:t>xargs</a:t>
-            </a:r>
-            <a:r>
-              <a:rPr lang="en-US" dirty="0"/>
-              <a:t> grep -l 'password'</a:t>
-            </a:r>
-            <a:endParaRPr dirty="0"/>
-          </a:p>
-          <a:p>
-            <a:pPr marL="0" lvl="0" indent="0" algn="l" rtl="0">
-              <a:spcBef>
-                <a:spcPts val="0"/>
-              </a:spcBef>
-              <a:spcAft>
-                <a:spcPts val="0"/>
-              </a:spcAft>
-              <a:buNone/>
-            </a:pPr>
-            <a:r>
-              <a:rPr lang="en-US" dirty="0"/>
-              <a:t>Let students suggest.</a:t>
-            </a:r>
-            <a:endParaRPr dirty="0"/>
+            <a:r>
+              <a:t>Take suggestions. Answer: `grep -r 'password' --include='*.py' .` (or find | xargs grep -l).</a:t>
+            </a:r>
           </a:p>
         </p:txBody>
       </p:sp>
@@ -3762,20 +3450,9 @@
           </a:bodyPr>
           <a:lstStyle/>
           <a:p>
-            <a:pPr marL="0" lvl="0" indent="0" algn="l" rtl="0">
-              <a:spcBef>
-                <a:spcPts val="0"/>
-              </a:spcBef>
-              <a:spcAft>
-                <a:spcPts val="0"/>
-              </a:spcAft>
-              <a:buNone/>
-            </a:pPr>
-            <a:r>
-              <a:rPr lang="en-US"/>
-              <a:t>Assignment: practice navigating the filesystem, create the chat-app directory structure, try the pipe exercises.</a:t>
-            </a:r>
-            <a:endParaRPr/>
+            <a:r>
+              <a:t>Assignment: navigate, build the chat-app tree, do the pipe exercises.</a:t>
+            </a:r>
           </a:p>
         </p:txBody>
       </p:sp>
@@ -3920,27 +3597,9 @@
           </a:bodyPr>
           <a:lstStyle/>
           <a:p>
-            <a:pPr marL="0" lvl="0" indent="0" algn="l" rtl="0">
-              <a:spcBef>
-                <a:spcPts val="0"/>
-              </a:spcBef>
-              <a:spcAft>
-                <a:spcPts val="0"/>
-              </a:spcAft>
-              <a:buNone/>
-            </a:pPr>
-            <a:r>
-              <a:rPr lang="en-US"/>
-              <a:t>grep + sort + uniq can replace a whole data processing script.</a:t>
-            </a:r>
-            <a:br>
-              <a:rPr lang="en-US"/>
-            </a:br>
-            <a:r>
-              <a:rPr lang="en-US"/>
-              <a:t>+’s and -’s of this: The plus is it’s very terse and efficient, less code is better. The minus is you’ll probably have less familiarity with it and 20 lines of bash is more conceptual overhead than 20 lines of python</a:t>
-            </a:r>
-            <a:endParaRPr/>
+            <a:r>
+              <a:t>grep|sort|uniq replaces a script. Downside: 20 lines bash costs more than 20 Python.</a:t>
+            </a:r>
           </a:p>
         </p:txBody>
       </p:sp>
@@ -4085,20 +3744,9 @@
           </a:bodyPr>
           <a:lstStyle/>
           <a:p>
-            <a:pPr marL="0" lvl="0" indent="0" algn="l" rtl="0">
-              <a:spcBef>
-                <a:spcPts val="0"/>
-              </a:spcBef>
-              <a:spcAft>
-                <a:spcPts val="0"/>
-              </a:spcAft>
-              <a:buNone/>
-            </a:pPr>
-            <a:r>
-              <a:rPr lang="en-US"/>
-              <a:t>Ask: 'Who here has used a terminal before?'</a:t>
-            </a:r>
-            <a:endParaRPr/>
+            <a:r>
+              <a:t>Show of hands: who has used a terminal?</a:t>
+            </a:r>
           </a:p>
         </p:txBody>
       </p:sp>
@@ -4242,22 +3890,7 @@
             <a:noAutofit/>
           </a:bodyPr>
           <a:lstStyle/>
-          <a:p>
-            <a:pPr marL="0" lvl="0" indent="0" algn="l" rtl="0">
-              <a:spcBef>
-                <a:spcPts val="0"/>
-              </a:spcBef>
-              <a:spcAft>
-                <a:spcPts val="0"/>
-              </a:spcAft>
-              <a:buNone/>
-            </a:pPr>
-            <a:r>
-              <a:rPr lang="en-US"/>
-              <a:t>Every command is the same shape - verb first, then optional flags that change how it behaves, then the arguments saying what to do it to.</a:t>
-            </a:r>
-            <a:endParaRPr/>
-          </a:p>
+          <a:p/>
         </p:txBody>
       </p:sp>
       <p:sp>
@@ -4401,20 +4034,9 @@
           </a:bodyPr>
           <a:lstStyle/>
           <a:p>
-            <a:pPr marL="0" lvl="0" indent="0" algn="l" rtl="0">
-              <a:spcBef>
-                <a:spcPts val="0"/>
-              </a:spcBef>
-              <a:spcAft>
-                <a:spcPts val="0"/>
-              </a:spcAft>
-              <a:buNone/>
-            </a:pPr>
-            <a:r>
-              <a:rPr lang="en-US"/>
-              <a:t>These three are most of what you'll ever do to get around. The thing to hold onto is that you're always 'standing' somewhere in the tree.</a:t>
-            </a:r>
-            <a:endParaRPr/>
+            <a:r>
+              <a:t>Point: you're always standing somewhere in the tree.</a:t>
+            </a:r>
           </a:p>
         </p:txBody>
       </p:sp>
@@ -4712,22 +4334,7 @@
             <a:noAutofit/>
           </a:bodyPr>
           <a:lstStyle/>
-          <a:p>
-            <a:pPr marL="0" lvl="0" indent="0" algn="l" rtl="0">
-              <a:spcBef>
-                <a:spcPts val="0"/>
-              </a:spcBef>
-              <a:spcAft>
-                <a:spcPts val="0"/>
-              </a:spcAft>
-              <a:buNone/>
-            </a:pPr>
-            <a:r>
-              <a:rPr lang="en-US"/>
-              <a:t>Point out: -l shows permissions, owner, size, date. -a reveals hidden files like .bashrc. ~ always takes you home.</a:t>
-            </a:r>
-            <a:endParaRPr/>
-          </a:p>
+          <a:p/>
         </p:txBody>
       </p:sp>
       <p:sp>
@@ -4871,20 +4478,9 @@
           </a:bodyPr>
           <a:lstStyle/>
           <a:p>
-            <a:pPr marL="0" lvl="0" indent="0" algn="l" rtl="0">
-              <a:spcBef>
-                <a:spcPts val="0"/>
-              </a:spcBef>
-              <a:spcAft>
-                <a:spcPts val="0"/>
-              </a:spcAft>
-              <a:buNone/>
-            </a:pPr>
-            <a:r>
-              <a:rPr lang="en-US"/>
-              <a:t>WARN students: rm is permanent. There is no recycle bin. Good habit: use 'ls' before 'rm' to double-check.</a:t>
-            </a:r>
-            <a:endParaRPr/>
+            <a:r>
+              <a:t>Habit: `ls` before `rm`.</a:t>
+            </a:r>
           </a:p>
         </p:txBody>
       </p:sp>
